--- a/BankCustomerchurnanalysis.pptx
+++ b/BankCustomerchurnanalysis.pptx
@@ -5,7 +5,7 @@
     <p:sldMasterId id="2147483660" r:id="rId1"/>
   </p:sldMasterIdLst>
   <p:notesMasterIdLst>
-    <p:notesMasterId r:id="rId20"/>
+    <p:notesMasterId r:id="rId21"/>
   </p:notesMasterIdLst>
   <p:sldIdLst>
     <p:sldId id="256" r:id="rId2"/>
@@ -25,7 +25,8 @@
     <p:sldId id="327" r:id="rId16"/>
     <p:sldId id="328" r:id="rId17"/>
     <p:sldId id="329" r:id="rId18"/>
-    <p:sldId id="330" r:id="rId19"/>
+    <p:sldId id="331" r:id="rId19"/>
+    <p:sldId id="330" r:id="rId20"/>
   </p:sldIdLst>
   <p:sldSz cx="9144000" cy="6858000" type="screen4x3"/>
   <p:notesSz cx="6858000" cy="9144000"/>
@@ -225,7 +226,7 @@
           <a:p>
             <a:fld id="{8C3AE24D-04D5-4F5F-9720-5463AED25156}" type="datetimeFigureOut">
               <a:rPr lang="en-IN" smtClean="0"/>
-              <a:t>03-04-2026</a:t>
+              <a:t>04-04-2026</a:t>
             </a:fld>
             <a:endParaRPr lang="en-IN"/>
           </a:p>
@@ -765,7 +766,7 @@
           <a:p>
             <a:fld id="{5BCAD085-E8A6-8845-BD4E-CB4CCA059FC4}" type="datetimeFigureOut">
               <a:rPr lang="en-US" smtClean="0"/>
-              <a:t>4/3/2026</a:t>
+              <a:t>4/4/2026</a:t>
             </a:fld>
             <a:endParaRPr lang="en-US"/>
           </a:p>
@@ -1097,7 +1098,7 @@
           <a:p>
             <a:fld id="{5BCAD085-E8A6-8845-BD4E-CB4CCA059FC4}" type="datetimeFigureOut">
               <a:rPr lang="en-US" smtClean="0"/>
-              <a:t>4/3/2026</a:t>
+              <a:t>4/4/2026</a:t>
             </a:fld>
             <a:endParaRPr lang="en-US"/>
           </a:p>
@@ -1496,7 +1497,7 @@
           <a:p>
             <a:fld id="{5BCAD085-E8A6-8845-BD4E-CB4CCA059FC4}" type="datetimeFigureOut">
               <a:rPr lang="en-US" smtClean="0"/>
-              <a:t>4/3/2026</a:t>
+              <a:t>4/4/2026</a:t>
             </a:fld>
             <a:endParaRPr lang="en-US"/>
           </a:p>
@@ -1830,7 +1831,7 @@
           <a:p>
             <a:fld id="{5BCAD085-E8A6-8845-BD4E-CB4CCA059FC4}" type="datetimeFigureOut">
               <a:rPr lang="en-US" smtClean="0"/>
-              <a:t>4/3/2026</a:t>
+              <a:t>4/4/2026</a:t>
             </a:fld>
             <a:endParaRPr lang="en-US"/>
           </a:p>
@@ -2148,7 +2149,7 @@
           <a:p>
             <a:fld id="{5BCAD085-E8A6-8845-BD4E-CB4CCA059FC4}" type="datetimeFigureOut">
               <a:rPr lang="en-US" smtClean="0"/>
-              <a:t>4/3/2026</a:t>
+              <a:t>4/4/2026</a:t>
             </a:fld>
             <a:endParaRPr lang="en-US"/>
           </a:p>
@@ -2542,7 +2543,7 @@
           <a:p>
             <a:fld id="{5BCAD085-E8A6-8845-BD4E-CB4CCA059FC4}" type="datetimeFigureOut">
               <a:rPr lang="en-US" smtClean="0"/>
-              <a:t>4/3/2026</a:t>
+              <a:t>4/4/2026</a:t>
             </a:fld>
             <a:endParaRPr lang="en-US"/>
           </a:p>
@@ -2797,7 +2798,7 @@
           <a:p>
             <a:fld id="{5BCAD085-E8A6-8845-BD4E-CB4CCA059FC4}" type="datetimeFigureOut">
               <a:rPr lang="en-US" smtClean="0"/>
-              <a:t>4/3/2026</a:t>
+              <a:t>4/4/2026</a:t>
             </a:fld>
             <a:endParaRPr lang="en-US"/>
           </a:p>
@@ -3057,7 +3058,7 @@
           <a:p>
             <a:fld id="{5BCAD085-E8A6-8845-BD4E-CB4CCA059FC4}" type="datetimeFigureOut">
               <a:rPr lang="en-US" smtClean="0"/>
-              <a:t>4/3/2026</a:t>
+              <a:t>4/4/2026</a:t>
             </a:fld>
             <a:endParaRPr lang="en-US"/>
           </a:p>
@@ -3317,7 +3318,7 @@
           <a:p>
             <a:fld id="{5BCAD085-E8A6-8845-BD4E-CB4CCA059FC4}" type="datetimeFigureOut">
               <a:rPr lang="en-US" smtClean="0"/>
-              <a:t>4/3/2026</a:t>
+              <a:t>4/4/2026</a:t>
             </a:fld>
             <a:endParaRPr lang="en-US"/>
           </a:p>
@@ -3644,7 +3645,7 @@
           <a:p>
             <a:fld id="{5BCAD085-E8A6-8845-BD4E-CB4CCA059FC4}" type="datetimeFigureOut">
               <a:rPr lang="en-US" smtClean="0"/>
-              <a:t>4/3/2026</a:t>
+              <a:t>4/4/2026</a:t>
             </a:fld>
             <a:endParaRPr lang="en-US"/>
           </a:p>
@@ -3965,7 +3966,7 @@
           <a:p>
             <a:fld id="{5BCAD085-E8A6-8845-BD4E-CB4CCA059FC4}" type="datetimeFigureOut">
               <a:rPr lang="en-US" smtClean="0"/>
-              <a:t>4/3/2026</a:t>
+              <a:t>4/4/2026</a:t>
             </a:fld>
             <a:endParaRPr lang="en-US"/>
           </a:p>
@@ -4420,7 +4421,7 @@
           <a:p>
             <a:fld id="{5BCAD085-E8A6-8845-BD4E-CB4CCA059FC4}" type="datetimeFigureOut">
               <a:rPr lang="en-US" smtClean="0"/>
-              <a:t>4/3/2026</a:t>
+              <a:t>4/4/2026</a:t>
             </a:fld>
             <a:endParaRPr lang="en-US"/>
           </a:p>
@@ -4628,7 +4629,7 @@
           <a:p>
             <a:fld id="{5BCAD085-E8A6-8845-BD4E-CB4CCA059FC4}" type="datetimeFigureOut">
               <a:rPr lang="en-US" smtClean="0"/>
-              <a:t>4/3/2026</a:t>
+              <a:t>4/4/2026</a:t>
             </a:fld>
             <a:endParaRPr lang="en-US"/>
           </a:p>
@@ -4803,7 +4804,7 @@
           <a:p>
             <a:fld id="{5BCAD085-E8A6-8845-BD4E-CB4CCA059FC4}" type="datetimeFigureOut">
               <a:rPr lang="en-US" smtClean="0"/>
-              <a:t>4/3/2026</a:t>
+              <a:t>4/4/2026</a:t>
             </a:fld>
             <a:endParaRPr lang="en-US"/>
           </a:p>
@@ -5134,7 +5135,7 @@
           <a:p>
             <a:fld id="{5BCAD085-E8A6-8845-BD4E-CB4CCA059FC4}" type="datetimeFigureOut">
               <a:rPr lang="en-US" smtClean="0"/>
-              <a:t>4/3/2026</a:t>
+              <a:t>4/4/2026</a:t>
             </a:fld>
             <a:endParaRPr lang="en-US"/>
           </a:p>
@@ -5477,7 +5478,7 @@
           <a:p>
             <a:fld id="{5BCAD085-E8A6-8845-BD4E-CB4CCA059FC4}" type="datetimeFigureOut">
               <a:rPr lang="en-US" smtClean="0"/>
-              <a:t>4/3/2026</a:t>
+              <a:t>4/4/2026</a:t>
             </a:fld>
             <a:endParaRPr lang="en-US"/>
           </a:p>
@@ -7592,7 +7593,7 @@
           <a:p>
             <a:fld id="{5BCAD085-E8A6-8845-BD4E-CB4CCA059FC4}" type="datetimeFigureOut">
               <a:rPr lang="en-US" smtClean="0"/>
-              <a:t>4/3/2026</a:t>
+              <a:t>4/4/2026</a:t>
             </a:fld>
             <a:endParaRPr lang="en-US"/>
           </a:p>
@@ -10116,6 +10117,278 @@
       </p:grpSpPr>
       <p:sp>
         <p:nvSpPr>
+          <p:cNvPr id="2" name="Title 1">
+            <a:extLst>
+              <a:ext uri="{FF2B5EF4-FFF2-40B4-BE49-F238E27FC236}">
+                <a16:creationId xmlns:a16="http://schemas.microsoft.com/office/drawing/2014/main" id="{7AADA66B-8876-8A99-352F-449F4F51DB0E}"/>
+              </a:ext>
+            </a:extLst>
+          </p:cNvPr>
+          <p:cNvSpPr>
+            <a:spLocks noGrp="1"/>
+          </p:cNvSpPr>
+          <p:nvPr>
+            <p:ph type="title"/>
+          </p:nvPr>
+        </p:nvSpPr>
+        <p:spPr>
+          <a:xfrm>
+            <a:off x="1524000" y="624110"/>
+            <a:ext cx="7452851" cy="1280890"/>
+          </a:xfrm>
+        </p:spPr>
+        <p:txBody>
+          <a:bodyPr>
+            <a:normAutofit fontScale="90000"/>
+          </a:bodyPr>
+          <a:lstStyle/>
+          <a:p>
+            <a:r>
+              <a:rPr lang="en-IN" sz="4900" b="1" dirty="0">
+                <a:solidFill>
+                  <a:srgbClr val="002060"/>
+                </a:solidFill>
+                <a:latin typeface="Cambria" panose="02040503050406030204" pitchFamily="18" charset="0"/>
+                <a:ea typeface="Cambria" panose="02040503050406030204" pitchFamily="18" charset="0"/>
+              </a:rPr>
+              <a:t>Business Recommendations</a:t>
+            </a:r>
+            <a:br>
+              <a:rPr lang="en-IN" dirty="0">
+                <a:solidFill>
+                  <a:srgbClr val="002060"/>
+                </a:solidFill>
+              </a:rPr>
+            </a:br>
+            <a:endParaRPr lang="en-IN" dirty="0">
+              <a:solidFill>
+                <a:srgbClr val="002060"/>
+              </a:solidFill>
+            </a:endParaRPr>
+          </a:p>
+        </p:txBody>
+      </p:sp>
+      <p:sp>
+        <p:nvSpPr>
+          <p:cNvPr id="3" name="Content Placeholder 2">
+            <a:extLst>
+              <a:ext uri="{FF2B5EF4-FFF2-40B4-BE49-F238E27FC236}">
+                <a16:creationId xmlns:a16="http://schemas.microsoft.com/office/drawing/2014/main" id="{561CCE29-5751-292A-5633-3025377022EA}"/>
+              </a:ext>
+            </a:extLst>
+          </p:cNvPr>
+          <p:cNvSpPr>
+            <a:spLocks noGrp="1"/>
+          </p:cNvSpPr>
+          <p:nvPr>
+            <p:ph idx="1"/>
+          </p:nvPr>
+        </p:nvSpPr>
+        <p:spPr>
+          <a:xfrm>
+            <a:off x="1524001" y="1691148"/>
+            <a:ext cx="7010400" cy="4857136"/>
+          </a:xfrm>
+        </p:spPr>
+        <p:txBody>
+          <a:bodyPr/>
+          <a:lstStyle/>
+          <a:p>
+            <a:r>
+              <a:rPr lang="en-IN" b="1" dirty="0">
+                <a:latin typeface="Cambria" panose="02040503050406030204" pitchFamily="18" charset="0"/>
+                <a:ea typeface="Cambria" panose="02040503050406030204" pitchFamily="18" charset="0"/>
+              </a:rPr>
+              <a:t>Increase customer engagement</a:t>
+            </a:r>
+            <a:br>
+              <a:rPr lang="en-IN" dirty="0">
+                <a:latin typeface="Cambria" panose="02040503050406030204" pitchFamily="18" charset="0"/>
+                <a:ea typeface="Cambria" panose="02040503050406030204" pitchFamily="18" charset="0"/>
+              </a:rPr>
+            </a:br>
+            <a:r>
+              <a:rPr lang="en-IN" dirty="0">
+                <a:latin typeface="Cambria" panose="02040503050406030204" pitchFamily="18" charset="0"/>
+                <a:ea typeface="Cambria" panose="02040503050406030204" pitchFamily="18" charset="0"/>
+              </a:rPr>
+              <a:t> Launch targeted campaigns for inactive customers </a:t>
+            </a:r>
+          </a:p>
+          <a:p>
+            <a:r>
+              <a:rPr lang="en-IN" b="1" dirty="0">
+                <a:latin typeface="Cambria" panose="02040503050406030204" pitchFamily="18" charset="0"/>
+                <a:ea typeface="Cambria" panose="02040503050406030204" pitchFamily="18" charset="0"/>
+              </a:rPr>
+              <a:t>Focus on high-value customers</a:t>
+            </a:r>
+            <a:br>
+              <a:rPr lang="en-IN" dirty="0">
+                <a:latin typeface="Cambria" panose="02040503050406030204" pitchFamily="18" charset="0"/>
+                <a:ea typeface="Cambria" panose="02040503050406030204" pitchFamily="18" charset="0"/>
+              </a:rPr>
+            </a:br>
+            <a:r>
+              <a:rPr lang="en-IN" dirty="0">
+                <a:latin typeface="Cambria" panose="02040503050406030204" pitchFamily="18" charset="0"/>
+                <a:ea typeface="Cambria" panose="02040503050406030204" pitchFamily="18" charset="0"/>
+              </a:rPr>
+              <a:t> Provide personalized offers and premium services</a:t>
+            </a:r>
+          </a:p>
+          <a:p>
+            <a:r>
+              <a:rPr lang="en-IN" dirty="0">
+                <a:latin typeface="Cambria" panose="02040503050406030204" pitchFamily="18" charset="0"/>
+                <a:ea typeface="Cambria" panose="02040503050406030204" pitchFamily="18" charset="0"/>
+              </a:rPr>
+              <a:t> </a:t>
+            </a:r>
+            <a:r>
+              <a:rPr lang="en-IN" b="1" dirty="0">
+                <a:latin typeface="Cambria" panose="02040503050406030204" pitchFamily="18" charset="0"/>
+                <a:ea typeface="Cambria" panose="02040503050406030204" pitchFamily="18" charset="0"/>
+              </a:rPr>
+              <a:t>Improve customer experience</a:t>
+            </a:r>
+            <a:br>
+              <a:rPr lang="en-IN" dirty="0">
+                <a:latin typeface="Cambria" panose="02040503050406030204" pitchFamily="18" charset="0"/>
+                <a:ea typeface="Cambria" panose="02040503050406030204" pitchFamily="18" charset="0"/>
+              </a:rPr>
+            </a:br>
+            <a:r>
+              <a:rPr lang="en-IN" dirty="0">
+                <a:latin typeface="Cambria" panose="02040503050406030204" pitchFamily="18" charset="0"/>
+                <a:ea typeface="Cambria" panose="02040503050406030204" pitchFamily="18" charset="0"/>
+              </a:rPr>
+              <a:t> Strengthen support and resolve complaints faster</a:t>
+            </a:r>
+          </a:p>
+          <a:p>
+            <a:r>
+              <a:rPr lang="en-IN" dirty="0">
+                <a:latin typeface="Cambria" panose="02040503050406030204" pitchFamily="18" charset="0"/>
+                <a:ea typeface="Cambria" panose="02040503050406030204" pitchFamily="18" charset="0"/>
+              </a:rPr>
+              <a:t> </a:t>
+            </a:r>
+            <a:r>
+              <a:rPr lang="en-US" altLang="en-US" b="1" dirty="0">
+                <a:solidFill>
+                  <a:schemeClr val="tx1"/>
+                </a:solidFill>
+                <a:latin typeface="Cambria" panose="02040503050406030204" pitchFamily="18" charset="0"/>
+                <a:ea typeface="Cambria" panose="02040503050406030204" pitchFamily="18" charset="0"/>
+              </a:rPr>
+              <a:t>Use data-driven strategies</a:t>
+            </a:r>
+            <a:br>
+              <a:rPr lang="en-US" altLang="en-US" dirty="0">
+                <a:solidFill>
+                  <a:schemeClr val="tx1"/>
+                </a:solidFill>
+                <a:latin typeface="Cambria" panose="02040503050406030204" pitchFamily="18" charset="0"/>
+                <a:ea typeface="Cambria" panose="02040503050406030204" pitchFamily="18" charset="0"/>
+              </a:rPr>
+            </a:br>
+            <a:r>
+              <a:rPr lang="en-US" altLang="en-US" dirty="0">
+                <a:solidFill>
+                  <a:schemeClr val="tx1"/>
+                </a:solidFill>
+                <a:latin typeface="Cambria" panose="02040503050406030204" pitchFamily="18" charset="0"/>
+                <a:ea typeface="Cambria" panose="02040503050406030204" pitchFamily="18" charset="0"/>
+              </a:rPr>
+              <a:t> Continuously monitor churn trends and customer behavior </a:t>
+            </a:r>
+          </a:p>
+          <a:p>
+            <a:r>
+              <a:rPr lang="en-US" altLang="en-US" dirty="0">
+                <a:solidFill>
+                  <a:schemeClr val="tx1"/>
+                </a:solidFill>
+                <a:latin typeface="Cambria" panose="02040503050406030204" pitchFamily="18" charset="0"/>
+                <a:ea typeface="Cambria" panose="02040503050406030204" pitchFamily="18" charset="0"/>
+              </a:rPr>
+              <a:t> </a:t>
+            </a:r>
+            <a:r>
+              <a:rPr lang="en-US" altLang="en-US" b="1" dirty="0">
+                <a:solidFill>
+                  <a:schemeClr val="tx1"/>
+                </a:solidFill>
+                <a:latin typeface="Cambria" panose="02040503050406030204" pitchFamily="18" charset="0"/>
+                <a:ea typeface="Cambria" panose="02040503050406030204" pitchFamily="18" charset="0"/>
+              </a:rPr>
+              <a:t>Implement predictive analytics</a:t>
+            </a:r>
+            <a:br>
+              <a:rPr lang="en-US" altLang="en-US" dirty="0">
+                <a:solidFill>
+                  <a:schemeClr val="tx1"/>
+                </a:solidFill>
+                <a:latin typeface="Cambria" panose="02040503050406030204" pitchFamily="18" charset="0"/>
+                <a:ea typeface="Cambria" panose="02040503050406030204" pitchFamily="18" charset="0"/>
+              </a:rPr>
+            </a:br>
+            <a:r>
+              <a:rPr lang="en-US" altLang="en-US" dirty="0">
+                <a:solidFill>
+                  <a:schemeClr val="tx1"/>
+                </a:solidFill>
+                <a:latin typeface="Cambria" panose="02040503050406030204" pitchFamily="18" charset="0"/>
+                <a:ea typeface="Cambria" panose="02040503050406030204" pitchFamily="18" charset="0"/>
+              </a:rPr>
+              <a:t> Identify at-risk customers early and take proactive actions </a:t>
+            </a:r>
+            <a:br>
+              <a:rPr lang="en-IN" dirty="0">
+                <a:latin typeface="Cambria" panose="02040503050406030204" pitchFamily="18" charset="0"/>
+                <a:ea typeface="Cambria" panose="02040503050406030204" pitchFamily="18" charset="0"/>
+              </a:rPr>
+            </a:br>
+            <a:endParaRPr lang="en-IN" dirty="0">
+              <a:latin typeface="Cambria" panose="02040503050406030204" pitchFamily="18" charset="0"/>
+              <a:ea typeface="Cambria" panose="02040503050406030204" pitchFamily="18" charset="0"/>
+            </a:endParaRPr>
+          </a:p>
+        </p:txBody>
+      </p:sp>
+    </p:spTree>
+    <p:extLst>
+      <p:ext uri="{BB962C8B-B14F-4D97-AF65-F5344CB8AC3E}">
+        <p14:creationId xmlns:p14="http://schemas.microsoft.com/office/powerpoint/2010/main" val="3054740312"/>
+      </p:ext>
+    </p:extLst>
+  </p:cSld>
+  <p:clrMapOvr>
+    <a:masterClrMapping/>
+  </p:clrMapOvr>
+</p:sld>
+</file>
+
+<file path=ppt/slides/slide19.xml><?xml version="1.0" encoding="utf-8"?>
+<p:sld xmlns:a="http://schemas.openxmlformats.org/drawingml/2006/main" xmlns:r="http://schemas.openxmlformats.org/officeDocument/2006/relationships" xmlns:p="http://schemas.openxmlformats.org/presentationml/2006/main">
+  <p:cSld>
+    <p:spTree>
+      <p:nvGrpSpPr>
+        <p:cNvPr id="1" name=""/>
+        <p:cNvGrpSpPr/>
+        <p:nvPr/>
+      </p:nvGrpSpPr>
+      <p:grpSpPr>
+        <a:xfrm>
+          <a:off x="0" y="0"/>
+          <a:ext cx="0" cy="0"/>
+          <a:chOff x="0" y="0"/>
+          <a:chExt cx="0" cy="0"/>
+        </a:xfrm>
+      </p:grpSpPr>
+      <p:sp>
+        <p:nvSpPr>
           <p:cNvPr id="4" name="Title 3">
             <a:extLst>
               <a:ext uri="{FF2B5EF4-FFF2-40B4-BE49-F238E27FC236}">
@@ -10841,7 +11114,10 @@
           <a:lstStyle/>
           <a:p>
             <a:r>
-              <a:rPr lang="en-US" dirty="0"/>
+              <a:rPr lang="en-US" dirty="0">
+                <a:latin typeface="Cambria" panose="02040503050406030204" pitchFamily="18" charset="0"/>
+                <a:ea typeface="Cambria" panose="02040503050406030204" pitchFamily="18" charset="0"/>
+              </a:rPr>
               <a:t>Missing values</a:t>
             </a:r>
           </a:p>
@@ -10850,11 +11126,17 @@
               <a:buNone/>
             </a:pPr>
             <a:r>
-              <a:rPr lang="en-US" dirty="0"/>
+              <a:rPr lang="en-US" dirty="0">
+                <a:latin typeface="Cambria" panose="02040503050406030204" pitchFamily="18" charset="0"/>
+                <a:ea typeface="Cambria" panose="02040503050406030204" pitchFamily="18" charset="0"/>
+              </a:rPr>
               <a:t>      </a:t>
             </a:r>
             <a:r>
-              <a:rPr lang="en-IN" dirty="0"/>
+              <a:rPr lang="en-IN" dirty="0">
+                <a:latin typeface="Cambria" panose="02040503050406030204" pitchFamily="18" charset="0"/>
+                <a:ea typeface="Cambria" panose="02040503050406030204" pitchFamily="18" charset="0"/>
+              </a:rPr>
               <a:t>-Applied mean amputation for numerical values.</a:t>
             </a:r>
           </a:p>
@@ -10863,7 +11145,10 @@
               <a:buNone/>
             </a:pPr>
             <a:r>
-              <a:rPr lang="en-IN" dirty="0"/>
+              <a:rPr lang="en-IN" dirty="0">
+                <a:latin typeface="Cambria" panose="02040503050406030204" pitchFamily="18" charset="0"/>
+                <a:ea typeface="Cambria" panose="02040503050406030204" pitchFamily="18" charset="0"/>
+              </a:rPr>
               <a:t>      -Removed the column Surname as it is not necessary </a:t>
             </a:r>
           </a:p>
@@ -10872,13 +11157,19 @@
               <a:buNone/>
             </a:pPr>
             <a:r>
-              <a:rPr lang="en-IN" dirty="0"/>
+              <a:rPr lang="en-IN" dirty="0">
+                <a:latin typeface="Cambria" panose="02040503050406030204" pitchFamily="18" charset="0"/>
+                <a:ea typeface="Cambria" panose="02040503050406030204" pitchFamily="18" charset="0"/>
+              </a:rPr>
               <a:t>        for analysis.</a:t>
             </a:r>
           </a:p>
           <a:p>
             <a:r>
-              <a:rPr lang="en-IN" dirty="0"/>
+              <a:rPr lang="en-IN" dirty="0">
+                <a:latin typeface="Cambria" panose="02040503050406030204" pitchFamily="18" charset="0"/>
+                <a:ea typeface="Cambria" panose="02040503050406030204" pitchFamily="18" charset="0"/>
+              </a:rPr>
               <a:t>Duplicates</a:t>
             </a:r>
           </a:p>
@@ -10887,28 +11178,43 @@
               <a:buNone/>
             </a:pPr>
             <a:r>
-              <a:rPr lang="en-IN" dirty="0"/>
+              <a:rPr lang="en-IN" dirty="0">
+                <a:latin typeface="Cambria" panose="02040503050406030204" pitchFamily="18" charset="0"/>
+                <a:ea typeface="Cambria" panose="02040503050406030204" pitchFamily="18" charset="0"/>
+              </a:rPr>
               <a:t>	-Removed the duplicates.</a:t>
             </a:r>
           </a:p>
           <a:p>
             <a:r>
-              <a:rPr lang="en-IN" dirty="0"/>
+              <a:rPr lang="en-IN" dirty="0">
+                <a:latin typeface="Cambria" panose="02040503050406030204" pitchFamily="18" charset="0"/>
+                <a:ea typeface="Cambria" panose="02040503050406030204" pitchFamily="18" charset="0"/>
+              </a:rPr>
               <a:t>Removed unwanted symbols.</a:t>
             </a:r>
           </a:p>
           <a:p>
             <a:r>
-              <a:rPr lang="en-IN" dirty="0"/>
+              <a:rPr lang="en-IN" dirty="0">
+                <a:latin typeface="Cambria" panose="02040503050406030204" pitchFamily="18" charset="0"/>
+                <a:ea typeface="Cambria" panose="02040503050406030204" pitchFamily="18" charset="0"/>
+              </a:rPr>
               <a:t>Changed the datatypes.</a:t>
             </a:r>
           </a:p>
           <a:p>
             <a:r>
-              <a:rPr lang="en-IN" dirty="0"/>
+              <a:rPr lang="en-IN" dirty="0">
+                <a:latin typeface="Cambria" panose="02040503050406030204" pitchFamily="18" charset="0"/>
+                <a:ea typeface="Cambria" panose="02040503050406030204" pitchFamily="18" charset="0"/>
+              </a:rPr>
               <a:t>Formatted column headers and standardized the column values.</a:t>
             </a:r>
-            <a:endParaRPr dirty="0"/>
+            <a:endParaRPr dirty="0">
+              <a:latin typeface="Cambria" panose="02040503050406030204" pitchFamily="18" charset="0"/>
+              <a:ea typeface="Cambria" panose="02040503050406030204" pitchFamily="18" charset="0"/>
+            </a:endParaRPr>
           </a:p>
         </p:txBody>
       </p:sp>
@@ -11625,7 +11931,7 @@
                 <a:latin typeface="Cambria" panose="02040503050406030204" pitchFamily="18" charset="0"/>
                 <a:ea typeface="Cambria" panose="02040503050406030204" pitchFamily="18" charset="0"/>
               </a:rPr>
-              <a:t>Churn Rate by Credit Score</a:t>
+              <a:t>Churn Rate by Account Balance</a:t>
             </a:r>
           </a:p>
           <a:p>
